--- a/m1/diapositivos/aula-12-f15.pptx
+++ b/m1/diapositivos/aula-12-f15.pptx
@@ -9446,7 +9446,7 @@
                 <a:ea typeface="Arial" pitchFamily="34" charset="-122"/>
                 <a:cs typeface="Arial" pitchFamily="34" charset="-120"/>
               </a:rPr>
-              <a:t>Vale «ou»: dá dois cantares à escolha</a:t>
+              <a:t>Vale «ou»: dá à dona dois cantares à escolha</a:t>
             </a:r>
             <a:endParaRPr lang="en-US" sz="2400" dirty="0"/>
           </a:p>
@@ -9633,7 +9633,7 @@
         <p:spPr>
           <a:xfrm>
             <a:off x="1417320" y="4501896"/>
-            <a:ext cx="9174175" cy="981456"/>
+            <a:ext cx="9174175" cy="600456"/>
           </a:xfrm>
           <a:prstGeom prst="rect">
             <a:avLst/>
@@ -9662,7 +9662,7 @@
                 <a:ea typeface="Arial" pitchFamily="34" charset="-122"/>
                 <a:cs typeface="Arial" pitchFamily="34" charset="-120"/>
               </a:rPr>
-              <a:t>Vale «mas»: opõe o cantar prometido ao «nunca» da queixa</a:t>
+              <a:t>Vale «mas»: opõe a promessa ao «nunca» da queixa</a:t>
             </a:r>
             <a:endParaRPr lang="en-US" sz="2400" dirty="0"/>
           </a:p>
@@ -9913,7 +9913,7 @@
                 <a:ea typeface="Arial" pitchFamily="34" charset="-122"/>
                 <a:cs typeface="Arial" pitchFamily="34" charset="-120"/>
               </a:rPr>
-              <a:t>Vale «mas»: opõe o cantar prometido ao «nunca» da queixa</a:t>
+              <a:t>Vale «mas»: opõe a promessa ao «nunca» da queixa</a:t>
             </a:r>
             <a:endParaRPr lang="en-US" sz="3400" dirty="0"/>
           </a:p>
